--- a/02_Docs/Manuscript/Fig1.pptx
+++ b/02_Docs/Manuscript/Fig1.pptx
@@ -302,7 +302,7 @@
           <a:p>
             <a:fld id="{5BCAD085-E8A6-8845-BD4E-CB4CCA059FC4}" type="datetimeFigureOut">
               <a:rPr lang="en-US" smtClean="0"/>
-              <a:t>6/21/2026</a:t>
+              <a:t>7/2/2026</a:t>
             </a:fld>
             <a:endParaRPr lang="en-US"/>
           </a:p>
@@ -470,7 +470,7 @@
           <a:p>
             <a:fld id="{5BCAD085-E8A6-8845-BD4E-CB4CCA059FC4}" type="datetimeFigureOut">
               <a:rPr lang="en-US" smtClean="0"/>
-              <a:t>6/21/2026</a:t>
+              <a:t>7/2/2026</a:t>
             </a:fld>
             <a:endParaRPr lang="en-US"/>
           </a:p>
@@ -648,7 +648,7 @@
           <a:p>
             <a:fld id="{5BCAD085-E8A6-8845-BD4E-CB4CCA059FC4}" type="datetimeFigureOut">
               <a:rPr lang="en-US" smtClean="0"/>
-              <a:t>6/21/2026</a:t>
+              <a:t>7/2/2026</a:t>
             </a:fld>
             <a:endParaRPr lang="en-US"/>
           </a:p>
@@ -816,7 +816,7 @@
           <a:p>
             <a:fld id="{5BCAD085-E8A6-8845-BD4E-CB4CCA059FC4}" type="datetimeFigureOut">
               <a:rPr lang="en-US" smtClean="0"/>
-              <a:t>6/21/2026</a:t>
+              <a:t>7/2/2026</a:t>
             </a:fld>
             <a:endParaRPr lang="en-US"/>
           </a:p>
@@ -1061,7 +1061,7 @@
           <a:p>
             <a:fld id="{5BCAD085-E8A6-8845-BD4E-CB4CCA059FC4}" type="datetimeFigureOut">
               <a:rPr lang="en-US" smtClean="0"/>
-              <a:t>6/21/2026</a:t>
+              <a:t>7/2/2026</a:t>
             </a:fld>
             <a:endParaRPr lang="en-US"/>
           </a:p>
@@ -1346,7 +1346,7 @@
           <a:p>
             <a:fld id="{5BCAD085-E8A6-8845-BD4E-CB4CCA059FC4}" type="datetimeFigureOut">
               <a:rPr lang="en-US" smtClean="0"/>
-              <a:t>6/21/2026</a:t>
+              <a:t>7/2/2026</a:t>
             </a:fld>
             <a:endParaRPr lang="en-US"/>
           </a:p>
@@ -1765,7 +1765,7 @@
           <a:p>
             <a:fld id="{5BCAD085-E8A6-8845-BD4E-CB4CCA059FC4}" type="datetimeFigureOut">
               <a:rPr lang="en-US" smtClean="0"/>
-              <a:t>6/21/2026</a:t>
+              <a:t>7/2/2026</a:t>
             </a:fld>
             <a:endParaRPr lang="en-US"/>
           </a:p>
@@ -1882,7 +1882,7 @@
           <a:p>
             <a:fld id="{5BCAD085-E8A6-8845-BD4E-CB4CCA059FC4}" type="datetimeFigureOut">
               <a:rPr lang="en-US" smtClean="0"/>
-              <a:t>6/21/2026</a:t>
+              <a:t>7/2/2026</a:t>
             </a:fld>
             <a:endParaRPr lang="en-US"/>
           </a:p>
@@ -1977,7 +1977,7 @@
           <a:p>
             <a:fld id="{5BCAD085-E8A6-8845-BD4E-CB4CCA059FC4}" type="datetimeFigureOut">
               <a:rPr lang="en-US" smtClean="0"/>
-              <a:t>6/21/2026</a:t>
+              <a:t>7/2/2026</a:t>
             </a:fld>
             <a:endParaRPr lang="en-US"/>
           </a:p>
@@ -2252,7 +2252,7 @@
           <a:p>
             <a:fld id="{5BCAD085-E8A6-8845-BD4E-CB4CCA059FC4}" type="datetimeFigureOut">
               <a:rPr lang="en-US" smtClean="0"/>
-              <a:t>6/21/2026</a:t>
+              <a:t>7/2/2026</a:t>
             </a:fld>
             <a:endParaRPr lang="en-US"/>
           </a:p>
@@ -2504,7 +2504,7 @@
           <a:p>
             <a:fld id="{5BCAD085-E8A6-8845-BD4E-CB4CCA059FC4}" type="datetimeFigureOut">
               <a:rPr lang="en-US" smtClean="0"/>
-              <a:t>6/21/2026</a:t>
+              <a:t>7/2/2026</a:t>
             </a:fld>
             <a:endParaRPr lang="en-US"/>
           </a:p>
@@ -2715,7 +2715,7 @@
           <a:p>
             <a:fld id="{5BCAD085-E8A6-8845-BD4E-CB4CCA059FC4}" type="datetimeFigureOut">
               <a:rPr lang="en-US" smtClean="0"/>
-              <a:t>6/21/2026</a:t>
+              <a:t>7/2/2026</a:t>
             </a:fld>
             <a:endParaRPr lang="en-US"/>
           </a:p>
@@ -3112,7 +3112,7 @@
         </p:nvSpPr>
         <p:spPr>
           <a:xfrm>
-            <a:off x="478915" y="3455335"/>
+            <a:off x="443674" y="3426074"/>
             <a:ext cx="11304651" cy="2717180"/>
           </a:xfrm>
           <a:prstGeom prst="roundRect">
@@ -3138,7 +3138,7 @@
           <a:lstStyle/>
           <a:p>
             <a:pPr algn="ctr"/>
-            <a:endParaRPr lang="en-US"/>
+            <a:endParaRPr lang="en-US" dirty="0"/>
           </a:p>
         </p:txBody>
       </p:sp>
@@ -3410,7 +3410,7 @@
         <p:spPr>
           <a:xfrm>
             <a:off x="4304270" y="1963001"/>
-            <a:ext cx="1234440" cy="530352"/>
+            <a:ext cx="1388060" cy="530352"/>
           </a:xfrm>
           <a:prstGeom prst="roundRect">
             <a:avLst/>
@@ -3450,25 +3450,7 @@
                 </a:solidFill>
                 <a:latin typeface="Aptos"/>
               </a:rPr>
-              <a:t>e</a:t>
-            </a:r>
-            <a:r>
-              <a:rPr sz="1200" b="1" dirty="0">
-                <a:solidFill>
-                  <a:srgbClr val="1F2937"/>
-                </a:solidFill>
-                <a:latin typeface="Aptos"/>
-              </a:rPr>
-              <a:t>xploratory</a:t>
-            </a:r>
-            <a:r>
-              <a:rPr lang="en-US" sz="1200" b="1" dirty="0">
-                <a:solidFill>
-                  <a:srgbClr val="1F2937"/>
-                </a:solidFill>
-                <a:latin typeface="Aptos"/>
-              </a:rPr>
-              <a:t> in vivo </a:t>
+              <a:t>single-dose in vivo </a:t>
             </a:r>
             <a:r>
               <a:rPr sz="1200" b="1" dirty="0">
@@ -3549,8 +3531,7 @@
                 </a:solidFill>
                 <a:latin typeface="Aptos"/>
               </a:rPr>
-              <a:t> 
-</a:t>
+              <a:t> </a:t>
             </a:r>
             <a:r>
               <a:rPr lang="en-US" sz="1200" b="1" dirty="0">
@@ -3559,7 +3540,8 @@
                 </a:solidFill>
                 <a:latin typeface="Aptos"/>
               </a:rPr>
-              <a:t>PK</a:t>
+              <a:t>
+PK</a:t>
             </a:r>
             <a:endParaRPr sz="1200" b="1" dirty="0">
               <a:solidFill>
@@ -3807,8 +3789,8 @@
         </p:nvSpPr>
         <p:spPr>
           <a:xfrm>
-            <a:off x="5538710" y="2196173"/>
-            <a:ext cx="640080" cy="64008"/>
+            <a:off x="5717758" y="2196173"/>
+            <a:ext cx="461031" cy="64008"/>
           </a:xfrm>
           <a:prstGeom prst="rightArrow">
             <a:avLst/>
@@ -4095,7 +4077,25 @@
                 </a:solidFill>
                 <a:latin typeface="Aptos"/>
               </a:rPr>
-              <a:t>–6 mo 
+              <a:t>–</a:t>
+            </a:r>
+            <a:r>
+              <a:rPr lang="en-US" sz="1200" b="1" dirty="0">
+                <a:solidFill>
+                  <a:srgbClr val="002060"/>
+                </a:solidFill>
+                <a:latin typeface="Aptos"/>
+              </a:rPr>
+              <a:t>4</a:t>
+            </a:r>
+            <a:r>
+              <a:rPr sz="1200" b="1" dirty="0">
+                <a:solidFill>
+                  <a:srgbClr val="002060"/>
+                </a:solidFill>
+                <a:latin typeface="Aptos"/>
+              </a:rPr>
+              <a:t> mo 
 +12–24+ </a:t>
             </a:r>
             <a:r>
@@ -4868,7 +4868,7 @@
         <p:spPr>
           <a:xfrm>
             <a:off x="4000690" y="4753467"/>
-            <a:ext cx="1691640" cy="530352"/>
+            <a:ext cx="1271757" cy="530352"/>
           </a:xfrm>
           <a:prstGeom prst="roundRect">
             <a:avLst/>
@@ -4902,13 +4902,22 @@
           <a:p>
             <a:pPr algn="ctr"/>
             <a:r>
-              <a:rPr sz="1200" b="1" dirty="0">
+              <a:rPr lang="en-US" sz="1200" b="1" dirty="0">
                 <a:solidFill>
                   <a:srgbClr val="1F2937"/>
                 </a:solidFill>
                 <a:latin typeface="Aptos"/>
               </a:rPr>
-              <a:t>a priori PBPK</a:t>
+              <a:t>a priori </a:t>
+            </a:r>
+            <a:r>
+              <a:rPr sz="1200" b="1" dirty="0">
+                <a:solidFill>
+                  <a:srgbClr val="1F2937"/>
+                </a:solidFill>
+                <a:latin typeface="Aptos"/>
+              </a:rPr>
+              <a:t>PBPK</a:t>
             </a:r>
           </a:p>
         </p:txBody>
@@ -4921,7 +4930,7 @@
         </p:nvSpPr>
         <p:spPr>
           <a:xfrm>
-            <a:off x="6012370" y="4753467"/>
+            <a:off x="5569198" y="4753467"/>
             <a:ext cx="1572768" cy="530352"/>
           </a:xfrm>
           <a:prstGeom prst="roundRect">
@@ -4975,7 +4984,7 @@
         </p:nvSpPr>
         <p:spPr>
           <a:xfrm>
-            <a:off x="7960040" y="4689458"/>
+            <a:off x="7478593" y="4700302"/>
             <a:ext cx="1884762" cy="658368"/>
           </a:xfrm>
           <a:prstGeom prst="diamond">
@@ -5035,7 +5044,7 @@
         </p:nvSpPr>
         <p:spPr>
           <a:xfrm>
-            <a:off x="9395027" y="4675117"/>
+            <a:off x="9043487" y="4411746"/>
             <a:ext cx="384048" cy="206210"/>
           </a:xfrm>
           <a:prstGeom prst="rect">
@@ -5070,7 +5079,7 @@
         </p:nvSpPr>
         <p:spPr>
           <a:xfrm>
-            <a:off x="8157186" y="5345306"/>
+            <a:off x="9098859" y="5340268"/>
             <a:ext cx="320040" cy="206210"/>
           </a:xfrm>
           <a:prstGeom prst="rect">
@@ -5088,7 +5097,7 @@
             <a:r>
               <a:rPr sz="1100" b="1" dirty="0">
                 <a:solidFill>
-                  <a:srgbClr val="C026D3"/>
+                  <a:srgbClr val="7030A0"/>
                 </a:solidFill>
                 <a:latin typeface="Aptos"/>
               </a:rPr>
@@ -5105,7 +5114,7 @@
         </p:nvSpPr>
         <p:spPr>
           <a:xfrm>
-            <a:off x="5536881" y="5644602"/>
+            <a:off x="8709850" y="5600962"/>
             <a:ext cx="1188720" cy="375487"/>
           </a:xfrm>
           <a:prstGeom prst="rect">
@@ -5123,7 +5132,7 @@
             <a:r>
               <a:rPr sz="1100" b="1" dirty="0">
                 <a:solidFill>
-                  <a:srgbClr val="C026D3"/>
+                  <a:srgbClr val="7030A0"/>
                 </a:solidFill>
                 <a:latin typeface="Aptos"/>
               </a:rPr>
@@ -5185,7 +5194,7 @@
         </p:nvSpPr>
         <p:spPr>
           <a:xfrm>
-            <a:off x="3938510" y="4315534"/>
+            <a:off x="3823406" y="4315534"/>
             <a:ext cx="1691640" cy="221599"/>
           </a:xfrm>
           <a:prstGeom prst="rect">
@@ -5214,49 +5223,13 @@
       </p:sp>
       <p:sp>
         <p:nvSpPr>
-          <p:cNvPr id="95" name="TextBox 94"/>
-          <p:cNvSpPr txBox="1"/>
-          <p:nvPr/>
-        </p:nvSpPr>
-        <p:spPr>
-          <a:xfrm>
-            <a:off x="8303124" y="4208036"/>
-            <a:ext cx="1097280" cy="406265"/>
-          </a:xfrm>
-          <a:prstGeom prst="rect">
-            <a:avLst/>
-          </a:prstGeom>
-          <a:noFill/>
-        </p:spPr>
-        <p:txBody>
-          <a:bodyPr wrap="square" lIns="36576" tIns="18288" rIns="36576" bIns="18288" anchor="ctr">
-            <a:spAutoFit/>
-          </a:bodyPr>
-          <a:lstStyle/>
-          <a:p>
-            <a:pPr algn="ctr"/>
-            <a:r>
-              <a:rPr sz="1200" b="1" dirty="0">
-                <a:solidFill>
-                  <a:srgbClr val="002060"/>
-                </a:solidFill>
-                <a:latin typeface="Aptos"/>
-              </a:rPr>
-              <a:t>pre-specified
-criteria</a:t>
-            </a:r>
-          </a:p>
-        </p:txBody>
-      </p:sp>
-      <p:sp>
-        <p:nvSpPr>
           <p:cNvPr id="112" name="Rectangle 111"/>
           <p:cNvSpPr/>
           <p:nvPr/>
         </p:nvSpPr>
         <p:spPr>
           <a:xfrm>
-            <a:off x="4406501" y="5350370"/>
+            <a:off x="4490947" y="5386946"/>
             <a:ext cx="292608" cy="146304"/>
           </a:xfrm>
           <a:prstGeom prst="rect">
@@ -5304,7 +5277,7 @@
         </p:nvCxnSpPr>
         <p:spPr>
           <a:xfrm flipV="1">
-            <a:off x="4457707" y="5408891"/>
+            <a:off x="4542153" y="5445467"/>
             <a:ext cx="65837" cy="36576"/>
           </a:xfrm>
           <a:prstGeom prst="line">
@@ -5341,7 +5314,7 @@
         </p:nvCxnSpPr>
         <p:spPr>
           <a:xfrm>
-            <a:off x="4523544" y="5408891"/>
+            <a:off x="4607990" y="5445467"/>
             <a:ext cx="58521" cy="21946"/>
           </a:xfrm>
           <a:prstGeom prst="line">
@@ -5378,7 +5351,7 @@
         </p:nvCxnSpPr>
         <p:spPr>
           <a:xfrm flipV="1">
-            <a:off x="4582065" y="5394261"/>
+            <a:off x="4666511" y="5430837"/>
             <a:ext cx="61448" cy="36576"/>
           </a:xfrm>
           <a:prstGeom prst="line">
@@ -5415,7 +5388,7 @@
         </p:nvCxnSpPr>
         <p:spPr>
           <a:xfrm>
-            <a:off x="4552805" y="5496674"/>
+            <a:off x="4637251" y="5533250"/>
             <a:ext cx="0" cy="36576"/>
           </a:xfrm>
           <a:prstGeom prst="line">
@@ -5452,45 +5425,8 @@
         </p:nvCxnSpPr>
         <p:spPr>
           <a:xfrm>
-            <a:off x="4511839" y="5533250"/>
+            <a:off x="4596285" y="5569826"/>
             <a:ext cx="81931" cy="0"/>
-          </a:xfrm>
-          <a:prstGeom prst="line">
-            <a:avLst/>
-          </a:prstGeom>
-          <a:ln w="9525">
-            <a:solidFill>
-              <a:srgbClr val="6B7280"/>
-            </a:solidFill>
-          </a:ln>
-        </p:spPr>
-        <p:style>
-          <a:lnRef idx="2">
-            <a:schemeClr val="accent1"/>
-          </a:lnRef>
-          <a:fillRef idx="0">
-            <a:schemeClr val="accent1"/>
-          </a:fillRef>
-          <a:effectRef idx="1">
-            <a:schemeClr val="accent1"/>
-          </a:effectRef>
-          <a:fontRef idx="minor">
-            <a:schemeClr val="tx1"/>
-          </a:fontRef>
-        </p:style>
-      </p:cxnSp>
-      <p:cxnSp>
-        <p:nvCxnSpPr>
-          <p:cNvPr id="122" name="Connector 121"/>
-          <p:cNvCxnSpPr>
-            <a:cxnSpLocks/>
-          </p:cNvCxnSpPr>
-          <p:nvPr/>
-        </p:nvCxnSpPr>
-        <p:spPr>
-          <a:xfrm>
-            <a:off x="6798754" y="5411835"/>
-            <a:ext cx="0" cy="36576"/>
           </a:xfrm>
           <a:prstGeom prst="line">
             <a:avLst/>
@@ -6063,7 +5999,7 @@
         </p:nvSpPr>
         <p:spPr>
           <a:xfrm>
-            <a:off x="6131241" y="4153446"/>
+            <a:off x="5692330" y="4153446"/>
             <a:ext cx="1173479" cy="461665"/>
           </a:xfrm>
           <a:prstGeom prst="rect">
@@ -6155,7 +6091,7 @@
         </p:blipFill>
         <p:spPr>
           <a:xfrm>
-            <a:off x="6611302" y="5322733"/>
+            <a:off x="6223242" y="5352606"/>
             <a:ext cx="321869" cy="321869"/>
           </a:xfrm>
           <a:prstGeom prst="rect">
@@ -6163,54 +6099,6 @@
           </a:prstGeom>
         </p:spPr>
       </p:pic>
-      <p:cxnSp>
-        <p:nvCxnSpPr>
-          <p:cNvPr id="173" name="Connector: Elbow 172">
-            <a:extLst>
-              <a:ext uri="{FF2B5EF4-FFF2-40B4-BE49-F238E27FC236}">
-                <a16:creationId xmlns:a16="http://schemas.microsoft.com/office/drawing/2014/main" id="{DAD9B51E-444A-6959-0EBA-BABB420B46E3}"/>
-              </a:ext>
-            </a:extLst>
-          </p:cNvPr>
-          <p:cNvCxnSpPr>
-            <a:cxnSpLocks/>
-            <a:stCxn id="79" idx="2"/>
-            <a:endCxn id="77" idx="2"/>
-          </p:cNvCxnSpPr>
-          <p:nvPr/>
-        </p:nvCxnSpPr>
-        <p:spPr>
-          <a:xfrm rot="5400000" flipH="1">
-            <a:off x="6842462" y="3287868"/>
-            <a:ext cx="64007" cy="4055911"/>
-          </a:xfrm>
-          <a:prstGeom prst="bentConnector3">
-            <a:avLst>
-              <a:gd name="adj1" fmla="val -1011921"/>
-            </a:avLst>
-          </a:prstGeom>
-          <a:ln>
-            <a:solidFill>
-              <a:srgbClr val="B2BEC9"/>
-            </a:solidFill>
-            <a:tailEnd type="triangle"/>
-          </a:ln>
-        </p:spPr>
-        <p:style>
-          <a:lnRef idx="2">
-            <a:schemeClr val="accent1"/>
-          </a:lnRef>
-          <a:fillRef idx="0">
-            <a:schemeClr val="accent1"/>
-          </a:fillRef>
-          <a:effectRef idx="1">
-            <a:schemeClr val="accent1"/>
-          </a:effectRef>
-          <a:fontRef idx="minor">
-            <a:schemeClr val="tx1"/>
-          </a:fontRef>
-        </p:style>
-      </p:cxnSp>
       <p:sp>
         <p:nvSpPr>
           <p:cNvPr id="181" name="Rounded Rectangle 73">
@@ -6275,7 +6163,7 @@
                 </a:solidFill>
                 <a:latin typeface="Aptos"/>
               </a:rPr>
-              <a:t>6-12 animals</a:t>
+              <a:t>6-9 animals</a:t>
             </a:r>
             <a:endParaRPr sz="1400" b="1" dirty="0">
               <a:solidFill>
@@ -6475,7 +6363,7 @@
         </p:nvSpPr>
         <p:spPr>
           <a:xfrm>
-            <a:off x="7570853" y="4992586"/>
+            <a:off x="7126723" y="4992586"/>
             <a:ext cx="404430" cy="64008"/>
           </a:xfrm>
           <a:prstGeom prst="rightArrow">
@@ -6525,7 +6413,7 @@
         </p:nvSpPr>
         <p:spPr>
           <a:xfrm>
-            <a:off x="5717759" y="4999669"/>
+            <a:off x="5280106" y="5018642"/>
             <a:ext cx="294611" cy="45719"/>
           </a:xfrm>
           <a:prstGeom prst="rightArrow">
@@ -6561,56 +6449,107 @@
           </a:p>
         </p:txBody>
       </p:sp>
-      <p:sp>
-        <p:nvSpPr>
-          <p:cNvPr id="193" name="Right Arrow 16">
+      <p:cxnSp>
+        <p:nvCxnSpPr>
+          <p:cNvPr id="26" name="Connector: Elbow 25">
             <a:extLst>
               <a:ext uri="{FF2B5EF4-FFF2-40B4-BE49-F238E27FC236}">
-                <a16:creationId xmlns:a16="http://schemas.microsoft.com/office/drawing/2014/main" id="{D9792789-AE85-6759-3050-C35507887FB8}"/>
+                <a16:creationId xmlns:a16="http://schemas.microsoft.com/office/drawing/2014/main" id="{441762C6-ED1C-D0AA-A494-FD60E55F4413}"/>
               </a:ext>
             </a:extLst>
           </p:cNvPr>
-          <p:cNvSpPr/>
-          <p:nvPr/>
-        </p:nvSpPr>
-        <p:spPr>
-          <a:xfrm>
-            <a:off x="9844802" y="5001449"/>
-            <a:ext cx="404001" cy="45719"/>
-          </a:xfrm>
-          <a:prstGeom prst="rightArrow">
-            <a:avLst/>
-          </a:prstGeom>
-          <a:solidFill>
-            <a:srgbClr val="B2BEC9"/>
-          </a:solidFill>
+          <p:cNvCxnSpPr>
+            <a:cxnSpLocks/>
+            <a:stCxn id="79" idx="0"/>
+            <a:endCxn id="182" idx="1"/>
+          </p:cNvCxnSpPr>
+          <p:nvPr/>
+        </p:nvCxnSpPr>
+        <p:spPr>
+          <a:xfrm rot="16200000" flipH="1">
+            <a:off x="9177454" y="3943821"/>
+            <a:ext cx="300053" cy="1813015"/>
+          </a:xfrm>
+          <a:prstGeom prst="bentConnector4">
+            <a:avLst>
+              <a:gd name="adj1" fmla="val -28069"/>
+              <a:gd name="adj2" fmla="val 68556"/>
+            </a:avLst>
+          </a:prstGeom>
           <a:ln>
-            <a:noFill/>
+            <a:solidFill>
+              <a:schemeClr val="bg1">
+                <a:lumMod val="85000"/>
+              </a:schemeClr>
+            </a:solidFill>
+            <a:tailEnd type="triangle"/>
           </a:ln>
         </p:spPr>
         <p:style>
-          <a:lnRef idx="1">
+          <a:lnRef idx="2">
             <a:schemeClr val="accent1"/>
           </a:lnRef>
-          <a:fillRef idx="3">
+          <a:fillRef idx="0">
             <a:schemeClr val="accent1"/>
           </a:fillRef>
-          <a:effectRef idx="2">
+          <a:effectRef idx="1">
             <a:schemeClr val="accent1"/>
           </a:effectRef>
           <a:fontRef idx="minor">
-            <a:schemeClr val="lt1"/>
+            <a:schemeClr val="tx1"/>
           </a:fontRef>
         </p:style>
-        <p:txBody>
-          <a:bodyPr rtlCol="0" anchor="ctr"/>
-          <a:lstStyle/>
-          <a:p>
-            <a:pPr algn="ctr"/>
-            <a:endParaRPr sz="4000" b="1"/>
-          </a:p>
-        </p:txBody>
-      </p:sp>
+      </p:cxnSp>
+      <p:cxnSp>
+        <p:nvCxnSpPr>
+          <p:cNvPr id="33" name="Connector: Elbow 32">
+            <a:extLst>
+              <a:ext uri="{FF2B5EF4-FFF2-40B4-BE49-F238E27FC236}">
+                <a16:creationId xmlns:a16="http://schemas.microsoft.com/office/drawing/2014/main" id="{F4066661-97A4-5938-AD5B-C9FA8B4DEB3F}"/>
+              </a:ext>
+            </a:extLst>
+          </p:cNvPr>
+          <p:cNvCxnSpPr>
+            <a:cxnSpLocks/>
+            <a:stCxn id="79" idx="2"/>
+          </p:cNvCxnSpPr>
+          <p:nvPr/>
+        </p:nvCxnSpPr>
+        <p:spPr>
+          <a:xfrm rot="5400000" flipH="1" flipV="1">
+            <a:off x="9217563" y="4342242"/>
+            <a:ext cx="219838" cy="1813017"/>
+          </a:xfrm>
+          <a:prstGeom prst="bentConnector4">
+            <a:avLst>
+              <a:gd name="adj1" fmla="val -82095"/>
+              <a:gd name="adj2" fmla="val 69087"/>
+            </a:avLst>
+          </a:prstGeom>
+          <a:ln>
+            <a:solidFill>
+              <a:schemeClr val="bg1">
+                <a:lumMod val="85000"/>
+              </a:schemeClr>
+            </a:solidFill>
+            <a:tailEnd type="triangle"/>
+          </a:ln>
+        </p:spPr>
+        <p:style>
+          <a:lnRef idx="2">
+            <a:schemeClr val="accent1"/>
+          </a:lnRef>
+          <a:fillRef idx="0">
+            <a:schemeClr val="accent1"/>
+          </a:fillRef>
+          <a:effectRef idx="1">
+            <a:schemeClr val="accent1"/>
+          </a:effectRef>
+          <a:fontRef idx="minor">
+            <a:schemeClr val="tx1"/>
+          </a:fontRef>
+        </p:style>
+      </p:cxnSp>
     </p:spTree>
   </p:cSld>
   <p:clrMapOvr>
